--- a/Development_D4/Guided_Practice/D4-L11_Practice_Room_D4_Consolidation_Range_Mastery.pptx
+++ b/Development_D4/Guided_Practice/D4-L11_Practice_Room_D4_Consolidation_Range_Mastery.pptx
@@ -12107,20 +12107,21 @@
           <a:bodyPr wrap="square" lIns="0" tIns="0" rIns="0" bIns="0" rtlCol="0" anchor="ctr"/>
           <a:lstStyle/>
           <a:p>
-            <a:pPr algn="l" indent="0" marL="0">
-              <a:buNone/>
-            </a:pPr>
-            <a:r>
-              <a:rPr lang="en-US" sz="3000" b="1" dirty="0">
+            <a:pPr rtl="1" algn="r" indent="0" marL="0">
+              <a:buNone/>
+            </a:pPr>
+            <a:r>
+              <a:rPr lang="ar-SA" altLang="en-US" sz="3000" b="1" dirty="0">
                 <a:solidFill>
                   <a:srgbClr val="B83227"/>
                 </a:solidFill>
-                <a:latin typeface="Calibri" pitchFamily="34" charset="0"/>
-                <a:cs typeface="Amiri" pitchFamily="2" charset="-78"/>
-              </a:rPr>
-              <a:t>(silence after a mistake)</a:t>
-            </a:r>
-            <a:endParaRPr lang="en-US" sz="3000" dirty="0"/>
+                <a:latin typeface="Amiri" pitchFamily="2" charset="-78"/>
+                <a:ea typeface="Amiri" pitchFamily="2" charset="-78"/>
+                <a:cs typeface="Amiri" pitchFamily="2" charset="-78"/>
+              </a:rPr>
+              <a:t>أَكْبَرُ مُشْكِلَةٍ هِيَ الثُّلُوجُ… لَا… آسِفٌ…</a:t>
+            </a:r>
+            <a:endParaRPr lang="ar-SA" sz="3000" dirty="0"/>
           </a:p>
         </p:txBody>
       </p:sp>
@@ -12156,7 +12157,7 @@
                 <a:latin typeface="Calibri" pitchFamily="34" charset="0"/>
                 <a:cs typeface="Amiri" pitchFamily="2" charset="-78"/>
               </a:rPr>
-              <a:t>Recover!</a:t>
+              <a:t>Stuck after a mistake? Recover!</a:t>
             </a:r>
             <a:endParaRPr lang="en-US" sz="1300" dirty="0"/>
           </a:p>
@@ -13189,20 +13190,21 @@
           <a:bodyPr wrap="square" lIns="0" tIns="0" rIns="0" bIns="0" rtlCol="0" anchor="ctr"/>
           <a:lstStyle/>
           <a:p>
-            <a:pPr algn="l" indent="0" marL="0">
-              <a:buNone/>
-            </a:pPr>
-            <a:r>
-              <a:rPr lang="en-US" sz="1800" dirty="0">
+            <a:pPr rtl="1" algn="r" indent="0" marL="0">
+              <a:buNone/>
+            </a:pPr>
+            <a:r>
+              <a:rPr lang="ar-SA" altLang="en-US" sz="1800" b="1" dirty="0">
                 <a:solidFill>
                   <a:srgbClr val="B83227"/>
                 </a:solidFill>
-                <a:latin typeface="Calibri" pitchFamily="34" charset="0"/>
-                <a:cs typeface="Amiri" pitchFamily="2" charset="-78"/>
-              </a:rPr>
-              <a:t>(silence after a mistake)</a:t>
-            </a:r>
-            <a:endParaRPr lang="en-US" sz="1800" dirty="0"/>
+                <a:latin typeface="Amiri" pitchFamily="2" charset="-78"/>
+                <a:ea typeface="Amiri" pitchFamily="2" charset="-78"/>
+                <a:cs typeface="Amiri" pitchFamily="2" charset="-78"/>
+              </a:rPr>
+              <a:t>أَكْبَرُ مُشْكِلَةٍ هِيَ الثُّلُوجُ… لَا… آسِفٌ…</a:t>
+            </a:r>
+            <a:endParaRPr lang="ar-SA" sz="1800" dirty="0"/>
           </a:p>
         </p:txBody>
       </p:sp>
@@ -13289,10 +13291,13 @@
           <a:lstStyle/>
           <a:p>
             <a:pPr rtl="1" algn="r" indent="0" marL="0">
-              <a:buNone/>
-            </a:pPr>
-            <a:r>
-              <a:rPr lang="ar-SA" altLang="en-US" sz="2400" b="1" dirty="0">
+              <a:lnSpc>
+                <a:spcPct val="120000"/>
+              </a:lnSpc>
+              <a:buNone/>
+            </a:pPr>
+            <a:r>
+              <a:rPr lang="ar-SA" altLang="en-US" sz="2100" b="1" dirty="0">
                 <a:solidFill>
                   <a:srgbClr val="1E6B52"/>
                 </a:solidFill>
@@ -13300,9 +13305,9 @@
                 <a:ea typeface="Amiri" pitchFamily="2" charset="-78"/>
                 <a:cs typeface="Amiri" pitchFamily="2" charset="-78"/>
               </a:rPr>
-              <a:t>لِأُصَحِّحْ ذٰلِكَ: …</a:t>
-            </a:r>
-            <a:endParaRPr lang="ar-SA" sz="2400" dirty="0"/>
+              <a:t>أَكْبَرُ مُشْكِلَةٍ هِيَ الثُّلُوجُ… لِأُصَحِّحْ ذٰلِكَ: الفَيَضَانَاتُ.</a:t>
+            </a:r>
+            <a:endParaRPr lang="ar-SA" sz="2100" dirty="0"/>
           </a:p>
         </p:txBody>
       </p:sp>
@@ -14590,11 +14595,11 @@
           <a:bodyPr wrap="square" lIns="0" tIns="0" rIns="0" bIns="0" rtlCol="0" anchor="ctr"/>
           <a:lstStyle/>
           <a:p>
-            <a:pPr algn="l" indent="0" marL="0">
-              <a:buNone/>
-            </a:pPr>
-            <a:r>
-              <a:rPr lang="ar-SA" altLang="en-US" sz="2000" b="1" dirty="0">
+            <a:pPr rtl="1" algn="r" indent="0" marL="0">
+              <a:buNone/>
+            </a:pPr>
+            <a:r>
+              <a:rPr lang="ar-SA" altLang="en-US" sz="1600" b="1" dirty="0">
                 <a:solidFill>
                   <a:srgbClr val="1B3B6F"/>
                 </a:solidFill>
@@ -14602,279 +14607,9 @@
                 <a:ea typeface="Amiri" pitchFamily="2" charset="-78"/>
                 <a:cs typeface="Amiri" pitchFamily="2" charset="-78"/>
               </a:rPr>
-              <a:t>يَسُودُ</a:t>
-            </a:r>
-            <a:pPr algn="l" indent="0" marL="0">
-              <a:buNone/>
-            </a:pPr>
-            <a:r>
-              <a:rPr lang="en-US" sz="1550" b="1" dirty="0">
-                <a:solidFill>
-                  <a:srgbClr val="1B3B6F"/>
-                </a:solidFill>
-                <a:latin typeface="Calibri" pitchFamily="34" charset="0"/>
-                <a:cs typeface="Amiri" pitchFamily="2" charset="-78"/>
-              </a:rPr>
-              <a:t> · </a:t>
-            </a:r>
-            <a:pPr algn="l" indent="0" marL="0">
-              <a:buNone/>
-            </a:pPr>
-            <a:r>
-              <a:rPr lang="ar-SA" altLang="en-US" sz="2000" b="1" dirty="0">
-                <a:solidFill>
-                  <a:srgbClr val="1B3B6F"/>
-                </a:solidFill>
-                <a:latin typeface="Amiri" pitchFamily="2" charset="-78"/>
-                <a:ea typeface="Amiri" pitchFamily="2" charset="-78"/>
-                <a:cs typeface="Amiri" pitchFamily="2" charset="-78"/>
-              </a:rPr>
-              <a:t>يَتَمَيَّزُ بِ</a:t>
-            </a:r>
-            <a:pPr algn="l" indent="0" marL="0">
-              <a:buNone/>
-            </a:pPr>
-            <a:r>
-              <a:rPr lang="en-US" sz="1550" b="1" dirty="0">
-                <a:solidFill>
-                  <a:srgbClr val="1B3B6F"/>
-                </a:solidFill>
-                <a:latin typeface="Calibri" pitchFamily="34" charset="0"/>
-                <a:cs typeface="Amiri" pitchFamily="2" charset="-78"/>
-              </a:rPr>
-              <a:t>…  ·  </a:t>
-            </a:r>
-            <a:pPr algn="l" indent="0" marL="0">
-              <a:buNone/>
-            </a:pPr>
-            <a:r>
-              <a:rPr lang="ar-SA" altLang="en-US" sz="2000" b="1" dirty="0">
-                <a:solidFill>
-                  <a:srgbClr val="1B3B6F"/>
-                </a:solidFill>
-                <a:latin typeface="Amiri" pitchFamily="2" charset="-78"/>
-                <a:ea typeface="Amiri" pitchFamily="2" charset="-78"/>
-                <a:cs typeface="Amiri" pitchFamily="2" charset="-78"/>
-              </a:rPr>
-              <a:t>بِسَبَبِ</a:t>
-            </a:r>
-            <a:pPr algn="l" indent="0" marL="0">
-              <a:buNone/>
-            </a:pPr>
-            <a:r>
-              <a:rPr lang="en-US" sz="1550" b="1" dirty="0">
-                <a:solidFill>
-                  <a:srgbClr val="1B3B6F"/>
-                </a:solidFill>
-                <a:latin typeface="Calibri" pitchFamily="34" charset="0"/>
-                <a:cs typeface="Amiri" pitchFamily="2" charset="-78"/>
-              </a:rPr>
-              <a:t> · </a:t>
-            </a:r>
-            <a:pPr algn="l" indent="0" marL="0">
-              <a:buNone/>
-            </a:pPr>
-            <a:r>
-              <a:rPr lang="ar-SA" altLang="en-US" sz="2000" b="1" dirty="0">
-                <a:solidFill>
-                  <a:srgbClr val="1B3B6F"/>
-                </a:solidFill>
-                <a:latin typeface="Amiri" pitchFamily="2" charset="-78"/>
-                <a:ea typeface="Amiri" pitchFamily="2" charset="-78"/>
-                <a:cs typeface="Amiri" pitchFamily="2" charset="-78"/>
-              </a:rPr>
-              <a:t>يُؤَدِّي إِلَى</a:t>
-            </a:r>
-            <a:pPr algn="l" indent="0" marL="0">
-              <a:buNone/>
-            </a:pPr>
-            <a:r>
-              <a:rPr lang="en-US" sz="1550" b="1" dirty="0">
-                <a:solidFill>
-                  <a:srgbClr val="1B3B6F"/>
-                </a:solidFill>
-                <a:latin typeface="Calibri" pitchFamily="34" charset="0"/>
-                <a:cs typeface="Amiri" pitchFamily="2" charset="-78"/>
-              </a:rPr>
-              <a:t>  ·  </a:t>
-            </a:r>
-            <a:pPr algn="l" indent="0" marL="0">
-              <a:buNone/>
-            </a:pPr>
-            <a:r>
-              <a:rPr lang="ar-SA" altLang="en-US" sz="2000" b="1" dirty="0">
-                <a:solidFill>
-                  <a:srgbClr val="1B3B6F"/>
-                </a:solidFill>
-                <a:latin typeface="Amiri" pitchFamily="2" charset="-78"/>
-                <a:ea typeface="Amiri" pitchFamily="2" charset="-78"/>
-                <a:cs typeface="Amiri" pitchFamily="2" charset="-78"/>
-              </a:rPr>
-              <a:t>مِمَّا يُسَبِّبُ</a:t>
-            </a:r>
-            <a:pPr algn="l" indent="0" marL="0">
-              <a:buNone/>
-            </a:pPr>
-            <a:r>
-              <a:rPr lang="en-US" sz="1550" b="1" dirty="0">
-                <a:solidFill>
-                  <a:srgbClr val="1B3B6F"/>
-                </a:solidFill>
-                <a:latin typeface="Calibri" pitchFamily="34" charset="0"/>
-                <a:cs typeface="Amiri" pitchFamily="2" charset="-78"/>
-              </a:rPr>
-              <a:t>  ·  </a:t>
-            </a:r>
-            <a:pPr algn="l" indent="0" marL="0">
-              <a:buNone/>
-            </a:pPr>
-            <a:r>
-              <a:rPr lang="ar-SA" altLang="en-US" sz="2000" b="1" dirty="0">
-                <a:solidFill>
-                  <a:srgbClr val="1B3B6F"/>
-                </a:solidFill>
-                <a:latin typeface="Amiri" pitchFamily="2" charset="-78"/>
-                <a:ea typeface="Amiri" pitchFamily="2" charset="-78"/>
-                <a:cs typeface="Amiri" pitchFamily="2" charset="-78"/>
-              </a:rPr>
-              <a:t>تُقْطَعُ</a:t>
-            </a:r>
-            <a:pPr algn="l" indent="0" marL="0">
-              <a:buNone/>
-            </a:pPr>
-            <a:r>
-              <a:rPr lang="en-US" sz="1550" b="1" dirty="0">
-                <a:solidFill>
-                  <a:srgbClr val="1B3B6F"/>
-                </a:solidFill>
-                <a:latin typeface="Calibri" pitchFamily="34" charset="0"/>
-                <a:cs typeface="Amiri" pitchFamily="2" charset="-78"/>
-              </a:rPr>
-              <a:t> · </a:t>
-            </a:r>
-            <a:pPr algn="l" indent="0" marL="0">
-              <a:buNone/>
-            </a:pPr>
-            <a:r>
-              <a:rPr lang="ar-SA" altLang="en-US" sz="2000" b="1" dirty="0">
-                <a:solidFill>
-                  <a:srgbClr val="1B3B6F"/>
-                </a:solidFill>
-                <a:latin typeface="Amiri" pitchFamily="2" charset="-78"/>
-                <a:ea typeface="Amiri" pitchFamily="2" charset="-78"/>
-                <a:cs typeface="Amiri" pitchFamily="2" charset="-78"/>
-              </a:rPr>
-              <a:t>يُلَوَّثُ</a:t>
-            </a:r>
-            <a:pPr algn="l" indent="0" marL="0">
-              <a:buNone/>
-            </a:pPr>
-            <a:r>
-              <a:rPr lang="en-US" sz="1550" b="1" dirty="0">
-                <a:solidFill>
-                  <a:srgbClr val="1B3B6F"/>
-                </a:solidFill>
-                <a:latin typeface="Calibri" pitchFamily="34" charset="0"/>
-                <a:cs typeface="Amiri" pitchFamily="2" charset="-78"/>
-              </a:rPr>
-              <a:t>  ·  </a:t>
-            </a:r>
-            <a:pPr algn="l" indent="0" marL="0">
-              <a:buNone/>
-            </a:pPr>
-            <a:r>
-              <a:rPr lang="ar-SA" altLang="en-US" sz="2000" b="1" dirty="0">
-                <a:solidFill>
-                  <a:srgbClr val="1B3B6F"/>
-                </a:solidFill>
-                <a:latin typeface="Amiri" pitchFamily="2" charset="-78"/>
-                <a:ea typeface="Amiri" pitchFamily="2" charset="-78"/>
-                <a:cs typeface="Amiri" pitchFamily="2" charset="-78"/>
-              </a:rPr>
-              <a:t>يَجِبُ عَلَى … أَنْ</a:t>
-            </a:r>
-            <a:pPr algn="l" indent="0" marL="0">
-              <a:buNone/>
-            </a:pPr>
-            <a:r>
-              <a:rPr lang="en-US" sz="1550" b="1" dirty="0">
-                <a:solidFill>
-                  <a:srgbClr val="1B3B6F"/>
-                </a:solidFill>
-                <a:latin typeface="Calibri" pitchFamily="34" charset="0"/>
-                <a:cs typeface="Amiri" pitchFamily="2" charset="-78"/>
-              </a:rPr>
-              <a:t>  ·  </a:t>
-            </a:r>
-            <a:pPr algn="l" indent="0" marL="0">
-              <a:buNone/>
-            </a:pPr>
-            <a:r>
-              <a:rPr lang="ar-SA" altLang="en-US" sz="2000" b="1" dirty="0">
-                <a:solidFill>
-                  <a:srgbClr val="1B3B6F"/>
-                </a:solidFill>
-                <a:latin typeface="Amiri" pitchFamily="2" charset="-78"/>
-                <a:ea typeface="Amiri" pitchFamily="2" charset="-78"/>
-                <a:cs typeface="Amiri" pitchFamily="2" charset="-78"/>
-              </a:rPr>
-              <a:t>إِذَا لَمْ</a:t>
-            </a:r>
-            <a:pPr algn="l" indent="0" marL="0">
-              <a:buNone/>
-            </a:pPr>
-            <a:r>
-              <a:rPr lang="en-US" sz="1550" b="1" dirty="0">
-                <a:solidFill>
-                  <a:srgbClr val="1B3B6F"/>
-                </a:solidFill>
-                <a:latin typeface="Calibri" pitchFamily="34" charset="0"/>
-                <a:cs typeface="Amiri" pitchFamily="2" charset="-78"/>
-              </a:rPr>
-              <a:t> + jussive  ·  </a:t>
-            </a:r>
-            <a:pPr algn="l" indent="0" marL="0">
-              <a:buNone/>
-            </a:pPr>
-            <a:r>
-              <a:rPr lang="ar-SA" altLang="en-US" sz="2000" b="1" dirty="0">
-                <a:solidFill>
-                  <a:srgbClr val="1B3B6F"/>
-                </a:solidFill>
-                <a:latin typeface="Amiri" pitchFamily="2" charset="-78"/>
-                <a:ea typeface="Amiri" pitchFamily="2" charset="-78"/>
-                <a:cs typeface="Amiri" pitchFamily="2" charset="-78"/>
-              </a:rPr>
-              <a:t>أَقْصِدُ أَنَّ</a:t>
-            </a:r>
-            <a:pPr algn="l" indent="0" marL="0">
-              <a:buNone/>
-            </a:pPr>
-            <a:r>
-              <a:rPr lang="en-US" sz="1550" b="1" dirty="0">
-                <a:solidFill>
-                  <a:srgbClr val="1B3B6F"/>
-                </a:solidFill>
-                <a:latin typeface="Calibri" pitchFamily="34" charset="0"/>
-                <a:cs typeface="Amiri" pitchFamily="2" charset="-78"/>
-              </a:rPr>
-              <a:t>  ·  </a:t>
-            </a:r>
-            <a:pPr algn="l" indent="0" marL="0">
-              <a:buNone/>
-            </a:pPr>
-            <a:r>
-              <a:rPr lang="ar-SA" altLang="en-US" sz="2000" b="1" dirty="0">
-                <a:solidFill>
-                  <a:srgbClr val="1B3B6F"/>
-                </a:solidFill>
-                <a:latin typeface="Amiri" pitchFamily="2" charset="-78"/>
-                <a:ea typeface="Amiri" pitchFamily="2" charset="-78"/>
-                <a:cs typeface="Amiri" pitchFamily="2" charset="-78"/>
-              </a:rPr>
-              <a:t>بِعِبَارَةٍ أُخْرَى</a:t>
-            </a:r>
-            <a:endParaRPr lang="en-US" sz="1550" dirty="0"/>
+              <a:t>يَسُودُ · يَتَمَيَّزُ بِ…  ·  بِسَبَبِ · يُؤَدِّي إِلَى  ·  مِمَّا يُسَبِّبُ  ·  تُقْطَعُ · يُلَوَّثُ  ·  يَجِبُ عَلَى … أَنْ  ·  إِذَا لَمْ نُرَشِّدْ  ·  أَقْصِدُ أَنَّ  ·  بِعِبَارَةٍ أُخْرَى</a:t>
+            </a:r>
+            <a:endParaRPr lang="ar-SA" sz="1600" dirty="0"/>
           </a:p>
         </p:txBody>
       </p:sp>
